--- a/docs/Spatial HD_human pericardium.pptx
+++ b/docs/Spatial HD_human pericardium.pptx
@@ -5,7 +5,8 @@
     <p:sldMasterId id="2147483648" r:id="rId1"/>
   </p:sldMasterIdLst>
   <p:sldIdLst>
-    <p:sldId id="257" r:id="rId2"/>
+    <p:sldId id="258" r:id="rId2"/>
+    <p:sldId id="259" r:id="rId3"/>
   </p:sldIdLst>
   <p:sldSz cx="12192000" cy="6858000"/>
   <p:notesSz cx="6858000" cy="9144000"/>
@@ -104,6 +105,11 @@
       </a:defRPr>
     </a:lvl9pPr>
   </p:defaultTextStyle>
+  <p:extLst>
+    <p:ext uri="{EFAFB233-063F-42B5-8137-9DF3F51BA10A}">
+      <p15:sldGuideLst xmlns:p15="http://schemas.microsoft.com/office/powerpoint/2012/main"/>
+    </p:ext>
+  </p:extLst>
 </p:presentation>
 </file>
 
@@ -256,7 +262,7 @@
           <a:p>
             <a:fld id="{20113E41-AD97-4314-8FCC-AD45874D60EF}" type="datetimeFigureOut">
               <a:rPr lang="zh-TW" altLang="en-US" smtClean="0"/>
-              <a:t>2026/9/3</a:t>
+              <a:t>2026/10/1</a:t>
             </a:fld>
             <a:endParaRPr lang="zh-TW" altLang="en-US"/>
           </a:p>
@@ -456,7 +462,7 @@
           <a:p>
             <a:fld id="{20113E41-AD97-4314-8FCC-AD45874D60EF}" type="datetimeFigureOut">
               <a:rPr lang="zh-TW" altLang="en-US" smtClean="0"/>
-              <a:t>2026/9/3</a:t>
+              <a:t>2026/10/1</a:t>
             </a:fld>
             <a:endParaRPr lang="zh-TW" altLang="en-US"/>
           </a:p>
@@ -666,7 +672,7 @@
           <a:p>
             <a:fld id="{20113E41-AD97-4314-8FCC-AD45874D60EF}" type="datetimeFigureOut">
               <a:rPr lang="zh-TW" altLang="en-US" smtClean="0"/>
-              <a:t>2026/9/3</a:t>
+              <a:t>2026/10/1</a:t>
             </a:fld>
             <a:endParaRPr lang="zh-TW" altLang="en-US"/>
           </a:p>
@@ -866,7 +872,7 @@
           <a:p>
             <a:fld id="{20113E41-AD97-4314-8FCC-AD45874D60EF}" type="datetimeFigureOut">
               <a:rPr lang="zh-TW" altLang="en-US" smtClean="0"/>
-              <a:t>2026/9/3</a:t>
+              <a:t>2026/10/1</a:t>
             </a:fld>
             <a:endParaRPr lang="zh-TW" altLang="en-US"/>
           </a:p>
@@ -1142,7 +1148,7 @@
           <a:p>
             <a:fld id="{20113E41-AD97-4314-8FCC-AD45874D60EF}" type="datetimeFigureOut">
               <a:rPr lang="zh-TW" altLang="en-US" smtClean="0"/>
-              <a:t>2026/9/3</a:t>
+              <a:t>2026/10/1</a:t>
             </a:fld>
             <a:endParaRPr lang="zh-TW" altLang="en-US"/>
           </a:p>
@@ -1410,7 +1416,7 @@
           <a:p>
             <a:fld id="{20113E41-AD97-4314-8FCC-AD45874D60EF}" type="datetimeFigureOut">
               <a:rPr lang="zh-TW" altLang="en-US" smtClean="0"/>
-              <a:t>2026/9/3</a:t>
+              <a:t>2026/10/1</a:t>
             </a:fld>
             <a:endParaRPr lang="zh-TW" altLang="en-US"/>
           </a:p>
@@ -1825,7 +1831,7 @@
           <a:p>
             <a:fld id="{20113E41-AD97-4314-8FCC-AD45874D60EF}" type="datetimeFigureOut">
               <a:rPr lang="zh-TW" altLang="en-US" smtClean="0"/>
-              <a:t>2026/9/3</a:t>
+              <a:t>2026/10/1</a:t>
             </a:fld>
             <a:endParaRPr lang="zh-TW" altLang="en-US"/>
           </a:p>
@@ -1967,7 +1973,7 @@
           <a:p>
             <a:fld id="{20113E41-AD97-4314-8FCC-AD45874D60EF}" type="datetimeFigureOut">
               <a:rPr lang="zh-TW" altLang="en-US" smtClean="0"/>
-              <a:t>2026/9/3</a:t>
+              <a:t>2026/10/1</a:t>
             </a:fld>
             <a:endParaRPr lang="zh-TW" altLang="en-US"/>
           </a:p>
@@ -2080,7 +2086,7 @@
           <a:p>
             <a:fld id="{20113E41-AD97-4314-8FCC-AD45874D60EF}" type="datetimeFigureOut">
               <a:rPr lang="zh-TW" altLang="en-US" smtClean="0"/>
-              <a:t>2026/9/3</a:t>
+              <a:t>2026/10/1</a:t>
             </a:fld>
             <a:endParaRPr lang="zh-TW" altLang="en-US"/>
           </a:p>
@@ -2393,7 +2399,7 @@
           <a:p>
             <a:fld id="{20113E41-AD97-4314-8FCC-AD45874D60EF}" type="datetimeFigureOut">
               <a:rPr lang="zh-TW" altLang="en-US" smtClean="0"/>
-              <a:t>2026/9/3</a:t>
+              <a:t>2026/10/1</a:t>
             </a:fld>
             <a:endParaRPr lang="zh-TW" altLang="en-US"/>
           </a:p>
@@ -2682,7 +2688,7 @@
           <a:p>
             <a:fld id="{20113E41-AD97-4314-8FCC-AD45874D60EF}" type="datetimeFigureOut">
               <a:rPr lang="zh-TW" altLang="en-US" smtClean="0"/>
-              <a:t>2026/9/3</a:t>
+              <a:t>2026/10/1</a:t>
             </a:fld>
             <a:endParaRPr lang="zh-TW" altLang="en-US"/>
           </a:p>
@@ -2925,7 +2931,7 @@
           <a:p>
             <a:fld id="{20113E41-AD97-4314-8FCC-AD45874D60EF}" type="datetimeFigureOut">
               <a:rPr lang="zh-TW" altLang="en-US" smtClean="0"/>
-              <a:t>2026/9/3</a:t>
+              <a:t>2026/10/1</a:t>
             </a:fld>
             <a:endParaRPr lang="zh-TW" altLang="en-US"/>
           </a:p>
@@ -3347,7 +3353,7 @@
           <p:cNvPr id="5" name="Picture 4">
             <a:extLst>
               <a:ext uri="{FF2B5EF4-FFF2-40B4-BE49-F238E27FC236}">
-                <a16:creationId xmlns:a16="http://schemas.microsoft.com/office/drawing/2014/main" id="{C37BCBD0-5626-13D8-B07D-58CAF0A91805}"/>
+                <a16:creationId xmlns:a16="http://schemas.microsoft.com/office/drawing/2014/main" id="{3F72F144-05D5-AC39-1509-462F2BFBAAD0}"/>
               </a:ext>
             </a:extLst>
           </p:cNvPr>
@@ -3357,33 +3363,278 @@
           <p:nvPr/>
         </p:nvPicPr>
         <p:blipFill>
-          <a:blip r:embed="rId2">
-            <a:extLst>
-              <a:ext uri="{28A0092B-C50C-407E-A947-70E740481C1C}">
-                <a14:useLocalDpi xmlns:a14="http://schemas.microsoft.com/office/drawing/2010/main" val="0"/>
-              </a:ext>
-            </a:extLst>
-          </a:blip>
+          <a:blip r:embed="rId2"/>
           <a:stretch>
             <a:fillRect/>
           </a:stretch>
         </p:blipFill>
         <p:spPr>
           <a:xfrm>
-            <a:off x="5231714" y="315837"/>
-            <a:ext cx="3248143" cy="2320102"/>
+            <a:off x="314632" y="1657529"/>
+            <a:ext cx="7935528" cy="4833543"/>
           </a:xfrm>
           <a:prstGeom prst="rect">
             <a:avLst/>
           </a:prstGeom>
         </p:spPr>
       </p:pic>
+      <p:sp>
+        <p:nvSpPr>
+          <p:cNvPr id="6" name="TextBox 5">
+            <a:extLst>
+              <a:ext uri="{FF2B5EF4-FFF2-40B4-BE49-F238E27FC236}">
+                <a16:creationId xmlns:a16="http://schemas.microsoft.com/office/drawing/2014/main" id="{3AE58556-F66F-DDB6-E2FF-79B7AD87F2AA}"/>
+              </a:ext>
+            </a:extLst>
+          </p:cNvPr>
+          <p:cNvSpPr txBox="1"/>
+          <p:nvPr/>
+        </p:nvSpPr>
+        <p:spPr>
+          <a:xfrm>
+            <a:off x="314632" y="366928"/>
+            <a:ext cx="6558116" cy="1200329"/>
+          </a:xfrm>
+          <a:prstGeom prst="rect">
+            <a:avLst/>
+          </a:prstGeom>
+          <a:noFill/>
+        </p:spPr>
+        <p:txBody>
+          <a:bodyPr wrap="square" rtlCol="0">
+            <a:spAutoFit/>
+          </a:bodyPr>
+          <a:lstStyle/>
+          <a:p>
+            <a:r>
+              <a:rPr lang="en-US" altLang="zh-TW" sz="1200" b="1" dirty="0"/>
+              <a:t>VEC         =c("PECAM1","CLDN5","ACKR1","VWF","PLVAP","ICAM2","AQP1"),  </a:t>
+            </a:r>
+          </a:p>
+          <a:p>
+            <a:r>
+              <a:rPr lang="en-US" altLang="zh-TW" sz="1200" b="1" dirty="0" err="1"/>
+              <a:t>PeriFb_VSMC</a:t>
+            </a:r>
+            <a:r>
+              <a:rPr lang="en-US" altLang="zh-TW" sz="1200" b="1" dirty="0"/>
+              <a:t> = c("COL1A1","COL1A2","MYL9","LUM","ACTA2","PDGFRB","TAGLN","MYH11"),  </a:t>
+            </a:r>
+          </a:p>
+          <a:p>
+            <a:r>
+              <a:rPr lang="en-US" altLang="zh-TW" sz="1200" b="1" dirty="0"/>
+              <a:t>FRC         = c("CCL19","PDPN","VCAM1","IL33","CLU","IL7","CXCL12","DCN"),  </a:t>
+            </a:r>
+          </a:p>
+          <a:p>
+            <a:r>
+              <a:rPr lang="en-US" altLang="zh-TW" sz="1200" b="1" dirty="0"/>
+              <a:t>Myeloid     = c("LYZ","S100A9","S100A8","CTSS","CST3","GPNMB","CD68","MRC1"),  </a:t>
+            </a:r>
+          </a:p>
+          <a:p>
+            <a:r>
+              <a:rPr lang="en-US" altLang="zh-TW" sz="1200" b="1" dirty="0" err="1"/>
+              <a:t>Tcell</a:t>
+            </a:r>
+            <a:r>
+              <a:rPr lang="en-US" altLang="zh-TW" sz="1200" b="1" dirty="0"/>
+              <a:t>       = c("CD3D","CD3E","CD3G","IL7R","TRBC1","TRBC2","TRAC"),  </a:t>
+            </a:r>
+          </a:p>
+          <a:p>
+            <a:r>
+              <a:rPr lang="en-US" altLang="zh-TW" sz="1200" b="1" dirty="0" err="1"/>
+              <a:t>Bcell</a:t>
+            </a:r>
+            <a:r>
+              <a:rPr lang="en-US" altLang="zh-TW" sz="1200" b="1" dirty="0"/>
+              <a:t>       = c("MS4A1","CD79A","CD79B","IGHM","MZB1","XBP1","CD38")</a:t>
+            </a:r>
+            <a:endParaRPr lang="zh-TW" altLang="en-US" sz="1200" dirty="0"/>
+          </a:p>
+        </p:txBody>
+      </p:sp>
+    </p:spTree>
+    <p:extLst>
+      <p:ext uri="{BB962C8B-B14F-4D97-AF65-F5344CB8AC3E}">
+        <p14:creationId xmlns:p14="http://schemas.microsoft.com/office/powerpoint/2010/main" val="1646060394"/>
+      </p:ext>
+    </p:extLst>
+  </p:cSld>
+  <p:clrMapOvr>
+    <a:masterClrMapping/>
+  </p:clrMapOvr>
+</p:sld>
+</file>
+
+<file path=ppt/slides/slide2.xml><?xml version="1.0" encoding="utf-8"?>
+<p:sld xmlns:a="http://schemas.openxmlformats.org/drawingml/2006/main" xmlns:r="http://schemas.openxmlformats.org/officeDocument/2006/relationships" xmlns:p="http://schemas.openxmlformats.org/presentationml/2006/main">
+  <p:cSld>
+    <p:spTree>
+      <p:nvGrpSpPr>
+        <p:cNvPr id="1" name=""/>
+        <p:cNvGrpSpPr/>
+        <p:nvPr/>
+      </p:nvGrpSpPr>
+      <p:grpSpPr>
+        <a:xfrm>
+          <a:off x="0" y="0"/>
+          <a:ext cx="0" cy="0"/>
+          <a:chOff x="0" y="0"/>
+          <a:chExt cx="0" cy="0"/>
+        </a:xfrm>
+      </p:grpSpPr>
       <p:pic>
         <p:nvPicPr>
-          <p:cNvPr id="7" name="Picture 6">
-            <a:extLst>
-              <a:ext uri="{FF2B5EF4-FFF2-40B4-BE49-F238E27FC236}">
-                <a16:creationId xmlns:a16="http://schemas.microsoft.com/office/drawing/2014/main" id="{E68C0331-5BEF-3EA8-6B2F-D42800D2767F}"/>
+          <p:cNvPr id="5" name="Picture 4">
+            <a:extLst>
+              <a:ext uri="{FF2B5EF4-FFF2-40B4-BE49-F238E27FC236}">
+                <a16:creationId xmlns:a16="http://schemas.microsoft.com/office/drawing/2014/main" id="{10F187E2-715C-9CC6-1B3D-71C5232203A2}"/>
+              </a:ext>
+            </a:extLst>
+          </p:cNvPr>
+          <p:cNvPicPr>
+            <a:picLocks noChangeAspect="1"/>
+          </p:cNvPicPr>
+          <p:nvPr/>
+        </p:nvPicPr>
+        <p:blipFill rotWithShape="1">
+          <a:blip r:embed="rId2">
+            <a:extLst>
+              <a:ext uri="{BEBA8EAE-BF5A-486C-A8C5-ECC9F3942E4B}">
+                <a14:imgProps xmlns:a14="http://schemas.microsoft.com/office/drawing/2010/main">
+                  <a14:imgLayer r:embed="rId3">
+                    <a14:imgEffect>
+                      <a14:brightnessContrast contrast="20000"/>
+                    </a14:imgEffect>
+                  </a14:imgLayer>
+                </a14:imgProps>
+              </a:ext>
+            </a:extLst>
+          </a:blip>
+          <a:srcRect r="8666"/>
+          <a:stretch/>
+        </p:blipFill>
+        <p:spPr>
+          <a:xfrm>
+            <a:off x="2103644" y="1219200"/>
+            <a:ext cx="9734805" cy="5359801"/>
+          </a:xfrm>
+          <a:prstGeom prst="rect">
+            <a:avLst/>
+          </a:prstGeom>
+        </p:spPr>
+      </p:pic>
+      <p:grpSp>
+        <p:nvGrpSpPr>
+          <p:cNvPr id="8" name="Group 7">
+            <a:extLst>
+              <a:ext uri="{FF2B5EF4-FFF2-40B4-BE49-F238E27FC236}">
+                <a16:creationId xmlns:a16="http://schemas.microsoft.com/office/drawing/2014/main" id="{DC5CD15D-BBDB-FE8F-0E2D-AD1BED3A4C0F}"/>
+              </a:ext>
+            </a:extLst>
+          </p:cNvPr>
+          <p:cNvGrpSpPr/>
+          <p:nvPr/>
+        </p:nvGrpSpPr>
+        <p:grpSpPr>
+          <a:xfrm>
+            <a:off x="137809" y="839438"/>
+            <a:ext cx="2310424" cy="2104104"/>
+            <a:chOff x="383458" y="589934"/>
+            <a:chExt cx="6253316" cy="5988187"/>
+          </a:xfrm>
+        </p:grpSpPr>
+        <p:pic>
+          <p:nvPicPr>
+            <p:cNvPr id="6" name="Picture 5">
+              <a:extLst>
+                <a:ext uri="{FF2B5EF4-FFF2-40B4-BE49-F238E27FC236}">
+                  <a16:creationId xmlns:a16="http://schemas.microsoft.com/office/drawing/2014/main" id="{36F86EF4-AD3D-90C2-0593-C198B220E26F}"/>
+                </a:ext>
+              </a:extLst>
+            </p:cNvPr>
+            <p:cNvPicPr>
+              <a:picLocks noChangeAspect="1"/>
+            </p:cNvPicPr>
+            <p:nvPr/>
+          </p:nvPicPr>
+          <p:blipFill rotWithShape="1">
+            <a:blip r:embed="rId4"/>
+            <a:srcRect l="25622" t="58928" r="48253"/>
+            <a:stretch/>
+          </p:blipFill>
+          <p:spPr>
+            <a:xfrm>
+              <a:off x="383458" y="589934"/>
+              <a:ext cx="6253316" cy="5988187"/>
+            </a:xfrm>
+            <a:prstGeom prst="rect">
+              <a:avLst/>
+            </a:prstGeom>
+          </p:spPr>
+        </p:pic>
+        <p:sp>
+          <p:nvSpPr>
+            <p:cNvPr id="7" name="Rectangle 6">
+              <a:extLst>
+                <a:ext uri="{FF2B5EF4-FFF2-40B4-BE49-F238E27FC236}">
+                  <a16:creationId xmlns:a16="http://schemas.microsoft.com/office/drawing/2014/main" id="{744F719A-AF33-6113-1366-638F5EEC80F8}"/>
+                </a:ext>
+              </a:extLst>
+            </p:cNvPr>
+            <p:cNvSpPr/>
+            <p:nvPr/>
+          </p:nvSpPr>
+          <p:spPr>
+            <a:xfrm>
+              <a:off x="2428567" y="4336026"/>
+              <a:ext cx="648929" cy="648929"/>
+            </a:xfrm>
+            <a:prstGeom prst="rect">
+              <a:avLst/>
+            </a:prstGeom>
+            <a:noFill/>
+            <a:ln w="28575">
+              <a:solidFill>
+                <a:srgbClr val="FF0000"/>
+              </a:solidFill>
+            </a:ln>
+          </p:spPr>
+          <p:style>
+            <a:lnRef idx="2">
+              <a:schemeClr val="accent1">
+                <a:shade val="15000"/>
+              </a:schemeClr>
+            </a:lnRef>
+            <a:fillRef idx="1">
+              <a:schemeClr val="accent1"/>
+            </a:fillRef>
+            <a:effectRef idx="0">
+              <a:schemeClr val="accent1"/>
+            </a:effectRef>
+            <a:fontRef idx="minor">
+              <a:schemeClr val="lt1"/>
+            </a:fontRef>
+          </p:style>
+          <p:txBody>
+            <a:bodyPr rtlCol="0" anchor="ctr"/>
+            <a:lstStyle/>
+            <a:p>
+              <a:pPr algn="ctr"/>
+              <a:endParaRPr lang="zh-TW" altLang="en-US"/>
+            </a:p>
+          </p:txBody>
+        </p:sp>
+      </p:grpSp>
+      <p:pic>
+        <p:nvPicPr>
+          <p:cNvPr id="13" name="Picture 12">
+            <a:extLst>
+              <a:ext uri="{FF2B5EF4-FFF2-40B4-BE49-F238E27FC236}">
+                <a16:creationId xmlns:a16="http://schemas.microsoft.com/office/drawing/2014/main" id="{31DE5859-045E-CBC9-514F-2ED8386F930A}"/>
               </a:ext>
             </a:extLst>
           </p:cNvPr>
@@ -3393,231 +3644,37 @@
           <p:nvPr/>
         </p:nvPicPr>
         <p:blipFill>
-          <a:blip r:embed="rId3">
-            <a:extLst>
-              <a:ext uri="{28A0092B-C50C-407E-A947-70E740481C1C}">
-                <a14:useLocalDpi xmlns:a14="http://schemas.microsoft.com/office/drawing/2010/main" val="0"/>
-              </a:ext>
-            </a:extLst>
-          </a:blip>
+          <a:blip r:embed="rId5"/>
           <a:stretch>
             <a:fillRect/>
           </a:stretch>
         </p:blipFill>
         <p:spPr>
           <a:xfrm>
-            <a:off x="5271043" y="2454986"/>
-            <a:ext cx="3248143" cy="2320102"/>
+            <a:off x="353551" y="3429000"/>
+            <a:ext cx="1509513" cy="2156448"/>
           </a:xfrm>
           <a:prstGeom prst="rect">
             <a:avLst/>
           </a:prstGeom>
         </p:spPr>
       </p:pic>
-      <p:pic>
-        <p:nvPicPr>
-          <p:cNvPr id="9" name="Picture 8">
-            <a:extLst>
-              <a:ext uri="{FF2B5EF4-FFF2-40B4-BE49-F238E27FC236}">
-                <a16:creationId xmlns:a16="http://schemas.microsoft.com/office/drawing/2014/main" id="{F59D2016-58E3-052E-1DE9-79BD0188E378}"/>
-              </a:ext>
-            </a:extLst>
-          </p:cNvPr>
-          <p:cNvPicPr>
-            <a:picLocks noChangeAspect="1"/>
-          </p:cNvPicPr>
+      <p:sp>
+        <p:nvSpPr>
+          <p:cNvPr id="14" name="TextBox 13">
+            <a:extLst>
+              <a:ext uri="{FF2B5EF4-FFF2-40B4-BE49-F238E27FC236}">
+                <a16:creationId xmlns:a16="http://schemas.microsoft.com/office/drawing/2014/main" id="{81F41C27-C5BC-5E49-E606-A7B42A58053F}"/>
+              </a:ext>
+            </a:extLst>
+          </p:cNvPr>
+          <p:cNvSpPr txBox="1"/>
           <p:nvPr/>
-        </p:nvPicPr>
-        <p:blipFill>
-          <a:blip r:embed="rId4">
-            <a:extLst>
-              <a:ext uri="{28A0092B-C50C-407E-A947-70E740481C1C}">
-                <a14:useLocalDpi xmlns:a14="http://schemas.microsoft.com/office/drawing/2010/main" val="0"/>
-              </a:ext>
-            </a:extLst>
-          </a:blip>
-          <a:stretch>
-            <a:fillRect/>
-          </a:stretch>
-        </p:blipFill>
+        </p:nvSpPr>
         <p:spPr>
           <a:xfrm>
-            <a:off x="8700789" y="315837"/>
-            <a:ext cx="3248143" cy="2320102"/>
-          </a:xfrm>
-          <a:prstGeom prst="rect">
-            <a:avLst/>
-          </a:prstGeom>
-        </p:spPr>
-      </p:pic>
-      <p:pic>
-        <p:nvPicPr>
-          <p:cNvPr id="11" name="Picture 10">
-            <a:extLst>
-              <a:ext uri="{FF2B5EF4-FFF2-40B4-BE49-F238E27FC236}">
-                <a16:creationId xmlns:a16="http://schemas.microsoft.com/office/drawing/2014/main" id="{12B8676F-AE0E-EC22-A91E-4ABC1F67F283}"/>
-              </a:ext>
-            </a:extLst>
-          </p:cNvPr>
-          <p:cNvPicPr>
-            <a:picLocks noChangeAspect="1"/>
-          </p:cNvPicPr>
-          <p:nvPr/>
-        </p:nvPicPr>
-        <p:blipFill rotWithShape="1">
-          <a:blip r:embed="rId5">
-            <a:extLst>
-              <a:ext uri="{BEBA8EAE-BF5A-486C-A8C5-ECC9F3942E4B}">
-                <a14:imgProps xmlns:a14="http://schemas.microsoft.com/office/drawing/2010/main">
-                  <a14:imgLayer r:embed="rId6">
-                    <a14:imgEffect>
-                      <a14:brightnessContrast contrast="40000"/>
-                    </a14:imgEffect>
-                  </a14:imgLayer>
-                </a14:imgProps>
-              </a:ext>
-              <a:ext uri="{28A0092B-C50C-407E-A947-70E740481C1C}">
-                <a14:useLocalDpi xmlns:a14="http://schemas.microsoft.com/office/drawing/2010/main" val="0"/>
-              </a:ext>
-            </a:extLst>
-          </a:blip>
-          <a:srcRect l="3118" t="19002" r="2034" b="14489"/>
-          <a:stretch/>
-        </p:blipFill>
-        <p:spPr>
-          <a:xfrm>
-            <a:off x="301133" y="390211"/>
-            <a:ext cx="4632229" cy="2320101"/>
-          </a:xfrm>
-          <a:prstGeom prst="rect">
-            <a:avLst/>
-          </a:prstGeom>
-        </p:spPr>
-      </p:pic>
-      <p:pic>
-        <p:nvPicPr>
-          <p:cNvPr id="15" name="Picture 14">
-            <a:extLst>
-              <a:ext uri="{FF2B5EF4-FFF2-40B4-BE49-F238E27FC236}">
-                <a16:creationId xmlns:a16="http://schemas.microsoft.com/office/drawing/2014/main" id="{62367832-1D22-1F31-2610-BC0D5EED0E9C}"/>
-              </a:ext>
-            </a:extLst>
-          </p:cNvPr>
-          <p:cNvPicPr>
-            <a:picLocks noChangeAspect="1"/>
-          </p:cNvPicPr>
-          <p:nvPr/>
-        </p:nvPicPr>
-        <p:blipFill>
-          <a:blip r:embed="rId7">
-            <a:extLst>
-              <a:ext uri="{28A0092B-C50C-407E-A947-70E740481C1C}">
-                <a14:useLocalDpi xmlns:a14="http://schemas.microsoft.com/office/drawing/2010/main" val="0"/>
-              </a:ext>
-            </a:extLst>
-          </a:blip>
-          <a:stretch>
-            <a:fillRect/>
-          </a:stretch>
-        </p:blipFill>
-        <p:spPr>
-          <a:xfrm>
-            <a:off x="5268304" y="4537898"/>
-            <a:ext cx="3248143" cy="2320102"/>
-          </a:xfrm>
-          <a:prstGeom prst="rect">
-            <a:avLst/>
-          </a:prstGeom>
-        </p:spPr>
-      </p:pic>
-      <p:pic>
-        <p:nvPicPr>
-          <p:cNvPr id="17" name="Picture 16">
-            <a:extLst>
-              <a:ext uri="{FF2B5EF4-FFF2-40B4-BE49-F238E27FC236}">
-                <a16:creationId xmlns:a16="http://schemas.microsoft.com/office/drawing/2014/main" id="{397A3E4D-40DD-C03E-FDB0-EC6FA896E93F}"/>
-              </a:ext>
-            </a:extLst>
-          </p:cNvPr>
-          <p:cNvPicPr>
-            <a:picLocks noChangeAspect="1"/>
-          </p:cNvPicPr>
-          <p:nvPr/>
-        </p:nvPicPr>
-        <p:blipFill>
-          <a:blip r:embed="rId8">
-            <a:extLst>
-              <a:ext uri="{28A0092B-C50C-407E-A947-70E740481C1C}">
-                <a14:useLocalDpi xmlns:a14="http://schemas.microsoft.com/office/drawing/2010/main" val="0"/>
-              </a:ext>
-            </a:extLst>
-          </a:blip>
-          <a:stretch>
-            <a:fillRect/>
-          </a:stretch>
-        </p:blipFill>
-        <p:spPr>
-          <a:xfrm>
-            <a:off x="8766875" y="2454986"/>
-            <a:ext cx="3248143" cy="2320102"/>
-          </a:xfrm>
-          <a:prstGeom prst="rect">
-            <a:avLst/>
-          </a:prstGeom>
-        </p:spPr>
-      </p:pic>
-      <p:pic>
-        <p:nvPicPr>
-          <p:cNvPr id="13" name="Picture 12">
-            <a:extLst>
-              <a:ext uri="{FF2B5EF4-FFF2-40B4-BE49-F238E27FC236}">
-                <a16:creationId xmlns:a16="http://schemas.microsoft.com/office/drawing/2014/main" id="{9F2FC955-2B5C-D717-7C93-64E32507B80A}"/>
-              </a:ext>
-            </a:extLst>
-          </p:cNvPr>
-          <p:cNvPicPr>
-            <a:picLocks noChangeAspect="1"/>
-          </p:cNvPicPr>
-          <p:nvPr/>
-        </p:nvPicPr>
-        <p:blipFill>
-          <a:blip r:embed="rId9">
-            <a:extLst>
-              <a:ext uri="{28A0092B-C50C-407E-A947-70E740481C1C}">
-                <a14:useLocalDpi xmlns:a14="http://schemas.microsoft.com/office/drawing/2010/main" val="0"/>
-              </a:ext>
-            </a:extLst>
-          </a:blip>
-          <a:stretch>
-            <a:fillRect/>
-          </a:stretch>
-        </p:blipFill>
-        <p:spPr>
-          <a:xfrm>
-            <a:off x="8757043" y="4537898"/>
-            <a:ext cx="3248143" cy="2320102"/>
-          </a:xfrm>
-          <a:prstGeom prst="rect">
-            <a:avLst/>
-          </a:prstGeom>
-        </p:spPr>
-      </p:pic>
-      <p:sp>
-        <p:nvSpPr>
-          <p:cNvPr id="18" name="TextBox 17">
-            <a:extLst>
-              <a:ext uri="{FF2B5EF4-FFF2-40B4-BE49-F238E27FC236}">
-                <a16:creationId xmlns:a16="http://schemas.microsoft.com/office/drawing/2014/main" id="{0A43FD18-876B-4F5C-733E-4B52EB981B00}"/>
-              </a:ext>
-            </a:extLst>
-          </p:cNvPr>
-          <p:cNvSpPr txBox="1"/>
-          <p:nvPr/>
-        </p:nvSpPr>
-        <p:spPr>
-          <a:xfrm>
-            <a:off x="108153" y="3031471"/>
-            <a:ext cx="4965292" cy="3077766"/>
+            <a:off x="216310" y="314957"/>
+            <a:ext cx="4508285" cy="369332"/>
           </a:xfrm>
           <a:prstGeom prst="rect">
             <a:avLst/>
@@ -3625,111 +3682,23 @@
           <a:noFill/>
         </p:spPr>
         <p:txBody>
-          <a:bodyPr wrap="square" rtlCol="0">
+          <a:bodyPr wrap="none" rtlCol="0">
             <a:spAutoFit/>
           </a:bodyPr>
           <a:lstStyle/>
           <a:p>
             <a:r>
-              <a:rPr lang="en-US" altLang="zh-TW" sz="1200" b="1" dirty="0"/>
-              <a:t>VEC</a:t>
-            </a:r>
-            <a:r>
-              <a:rPr lang="en-US" altLang="zh-TW" sz="1200" dirty="0"/>
-              <a:t> </a:t>
-            </a:r>
-            <a:r>
-              <a:rPr lang="en-GB" altLang="zh-TW" sz="1200" dirty="0"/>
-              <a:t>:</a:t>
-            </a:r>
-            <a:r>
-              <a:rPr lang="en-US" altLang="zh-TW" sz="1200" dirty="0"/>
-              <a:t> "PECAM1","CDH5","VWF","ICAM2","PLVAP","AQP1","ENG“</a:t>
-            </a:r>
-          </a:p>
-          <a:p>
-            <a:r>
-              <a:rPr lang="en-US" altLang="zh-TW" sz="1200" dirty="0"/>
-              <a:t> </a:t>
-            </a:r>
-          </a:p>
-          <a:p>
-            <a:r>
-              <a:rPr lang="en-US" altLang="zh-TW" sz="1200" b="1" dirty="0"/>
-              <a:t>Fb</a:t>
-            </a:r>
-            <a:r>
-              <a:rPr lang="en-US" altLang="zh-TW" sz="1200" dirty="0"/>
-              <a:t> : "COL3A1","COL1A2","PDGFRA","PDGFRB","DCN","LUM","COL1A1",              "ACTA2","TAGLN","MYH11","RGS5","NOTCH3“</a:t>
-            </a:r>
-          </a:p>
-          <a:p>
-            <a:endParaRPr lang="en-US" altLang="zh-TW" sz="1200" dirty="0"/>
-          </a:p>
-          <a:p>
-            <a:r>
-              <a:rPr lang="en-US" altLang="zh-TW" sz="1200" b="1" dirty="0"/>
-              <a:t>FRC</a:t>
-            </a:r>
-            <a:r>
-              <a:rPr lang="en-US" altLang="zh-TW" sz="1200" dirty="0"/>
-              <a:t> : "CCL19","CXCL13","CLU","VCAM1","ICAM1“</a:t>
-            </a:r>
-          </a:p>
-          <a:p>
-            <a:endParaRPr lang="en-US" altLang="zh-TW" sz="1200" b="1" dirty="0"/>
-          </a:p>
-          <a:p>
-            <a:r>
-              <a:rPr lang="en-US" altLang="zh-TW" sz="1200" b="1" dirty="0"/>
-              <a:t>Myeloid </a:t>
-            </a:r>
-            <a:r>
-              <a:rPr lang="en-US" altLang="zh-TW" sz="1200" dirty="0"/>
-              <a:t>: "MRC1","SIRPA","PTPRC","CSF1R","HLA-DRA","HLA-DRB1","S100A9","LYZ", "FCN1","ITGAX","CD14","MARCO","SIGLEC1","CCR2","CLEC4C","TLR7“</a:t>
-            </a:r>
-          </a:p>
-          <a:p>
-            <a:endParaRPr lang="en-US" altLang="zh-TW" sz="1200" dirty="0"/>
-          </a:p>
-          <a:p>
-            <a:r>
-              <a:rPr lang="en-US" altLang="zh-TW" sz="1200" b="1" dirty="0" err="1"/>
-              <a:t>Tcell</a:t>
-            </a:r>
-            <a:r>
-              <a:rPr lang="en-US" altLang="zh-TW" sz="1200" dirty="0"/>
-              <a:t> :  "CD3D","CD3E","CD3G","CD28","IL7R","IL2RB","CD4","CCR7","CTLA4“</a:t>
-            </a:r>
-          </a:p>
-          <a:p>
-            <a:endParaRPr lang="en-US" altLang="zh-TW" sz="1200" dirty="0"/>
-          </a:p>
-          <a:p>
-            <a:r>
-              <a:rPr lang="en-US" altLang="zh-TW" sz="1200" b="1" dirty="0"/>
-              <a:t> </a:t>
-            </a:r>
-            <a:r>
-              <a:rPr lang="en-US" altLang="zh-TW" sz="1200" b="1" dirty="0" err="1"/>
-              <a:t>Bcell</a:t>
-            </a:r>
-            <a:r>
-              <a:rPr lang="en-US" altLang="zh-TW" sz="1200" b="1" dirty="0"/>
-              <a:t> </a:t>
-            </a:r>
-            <a:r>
-              <a:rPr lang="en-US" altLang="zh-TW" sz="1200" dirty="0"/>
-              <a:t>: "MS4A1","CD79A","CD79B","CD72","CD38","IGHD","IGHM","CD24",              "JCHAIN","IGKC","IGHG1","IGHG3","IGHA1"</a:t>
-            </a:r>
-            <a:endParaRPr lang="zh-TW" altLang="en-US" sz="1200" dirty="0"/>
+              <a:rPr lang="en-GB" altLang="zh-TW" dirty="0"/>
+              <a:t>Zoom-in image overlaid with cell projection:</a:t>
+            </a:r>
+            <a:endParaRPr lang="zh-TW" altLang="en-US" dirty="0"/>
           </a:p>
         </p:txBody>
       </p:sp>
     </p:spTree>
     <p:extLst>
       <p:ext uri="{BB962C8B-B14F-4D97-AF65-F5344CB8AC3E}">
-        <p14:creationId xmlns:p14="http://schemas.microsoft.com/office/powerpoint/2010/main" val="3070976099"/>
+        <p14:creationId xmlns:p14="http://schemas.microsoft.com/office/powerpoint/2010/main" val="84460659"/>
       </p:ext>
     </p:extLst>
   </p:cSld>
